--- a/presentation/MEDSCAN_TECHgium_MedTech.pptx
+++ b/presentation/MEDSCAN_TECHgium_MedTech.pptx
@@ -13,9 +13,11 @@
     <p:sldId id="307" r:id="rId4"/>
     <p:sldId id="308" r:id="rId5"/>
     <p:sldId id="329" r:id="rId6"/>
+    <p:sldId id="338" r:id="rId17"/>
     <p:sldId id="332" r:id="rId7"/>
-    <p:sldId id="338" r:id="rId17"/>
     <p:sldId id="339" r:id="rId18"/>
+    <p:sldId id="340" r:id="rId19"/>
+    <p:sldId id="341" r:id="rId20"/>
     <p:sldId id="333" r:id="rId8"/>
     <p:sldId id="335" r:id="rId9"/>
     <p:sldId id="337" r:id="rId10"/>
@@ -328,6 +330,294 @@
             <a:noFill/>
           </a:ln>
         </c:spPr>
+        <c:txPr>
+          <a:bodyPr/>
+          <a:lstStyle/>
+          <a:p>
+            <a:pPr>
+              <a:defRPr sz="1100"/>
+            </a:pPr>
+          </a:p>
+        </c:txPr>
+        <c:crossAx val="-2068027336"/>
+        <c:crosses val="autoZero"/>
+      </c:valAx>
+    </c:plotArea>
+    <c:legend>
+      <c:legendPos val="t"/>
+      <c:overlay val="0"/>
+      <c:txPr>
+        <a:bodyPr/>
+        <a:lstStyle/>
+        <a:p>
+          <a:pPr>
+            <a:defRPr sz="1200"/>
+          </a:pPr>
+        </a:p>
+      </c:txPr>
+    </c:legend>
+    <c:dispBlanksAs val="gap"/>
+  </c:chart>
+  <c:txPr>
+    <a:bodyPr/>
+    <a:lstStyle/>
+    <a:p>
+      <a:pPr>
+        <a:defRPr sz="1800"/>
+      </a:pPr>
+      <a:endParaRPr lang="en-US"/>
+    </a:p>
+  </c:txPr>
+  <c:externalData r:id="rId1">
+    <c:autoUpdate val="0"/>
+  </c:externalData>
+</c:chartSpace>
+</file>
+
+<file path=ppt/charts/chart2.xml><?xml version="1.0" encoding="utf-8"?>
+<c:chartSpace xmlns:c="http://schemas.openxmlformats.org/drawingml/2006/chart" xmlns:a="http://schemas.openxmlformats.org/drawingml/2006/main" xmlns:r="http://schemas.openxmlformats.org/officeDocument/2006/relationships">
+  <c:date1904 val="0"/>
+  <c:chart>
+    <c:autoTitleDeleted val="0"/>
+    <c:plotArea>
+      <c:barChart>
+        <c:barDir val="col"/>
+        <c:grouping val="clustered"/>
+        <c:ser>
+          <c:idx val="0"/>
+          <c:order val="0"/>
+          <c:tx>
+            <c:strRef>
+              <c:f>Sheet1!$B$1</c:f>
+              <c:strCache>
+                <c:ptCount val="1"/>
+                <c:pt idx="0">
+                  <c:v>Doctor alone</c:v>
+                </c:pt>
+              </c:strCache>
+            </c:strRef>
+          </c:tx>
+          <c:spPr>
+            <a:solidFill>
+              <a:srgbClr val="A6B4C0"/>
+            </a:solidFill>
+          </c:spPr>
+          <c:cat>
+            <c:strRef>
+              <c:f>Sheet1!$A$2:$A$4</c:f>
+              <c:strCache>
+                <c:ptCount val="3"/>
+                <c:pt idx="0">
+                  <c:v>Trainee</c:v>
+                </c:pt>
+                <c:pt idx="1">
+                  <c:v>Registrar</c:v>
+                </c:pt>
+                <c:pt idx="2">
+                  <c:v>Consultant</c:v>
+                </c:pt>
+              </c:strCache>
+            </c:strRef>
+          </c:cat>
+          <c:val>
+            <c:numRef>
+              <c:f>Sheet1!$B$2:$B$4</c:f>
+              <c:numCache>
+                <c:formatCode>General</c:formatCode>
+                <c:ptCount val="3"/>
+                <c:pt idx="0">
+                  <c:v>0.86</c:v>
+                </c:pt>
+                <c:pt idx="1">
+                  <c:v>0.9</c:v>
+                </c:pt>
+                <c:pt idx="2">
+                  <c:v>0.95</c:v>
+                </c:pt>
+              </c:numCache>
+            </c:numRef>
+          </c:val>
+        </c:ser>
+        <c:ser>
+          <c:idx val="1"/>
+          <c:order val="1"/>
+          <c:tx>
+            <c:strRef>
+              <c:f>Sheet1!$C$1</c:f>
+              <c:strCache>
+                <c:ptCount val="1"/>
+                <c:pt idx="0">
+                  <c:v>AI alone</c:v>
+                </c:pt>
+              </c:strCache>
+            </c:strRef>
+          </c:tx>
+          <c:spPr>
+            <a:solidFill>
+              <a:srgbClr val="0F766E"/>
+            </a:solidFill>
+          </c:spPr>
+          <c:cat>
+            <c:strRef>
+              <c:f>Sheet1!$A$2:$A$4</c:f>
+              <c:strCache>
+                <c:ptCount val="3"/>
+                <c:pt idx="0">
+                  <c:v>Trainee</c:v>
+                </c:pt>
+                <c:pt idx="1">
+                  <c:v>Registrar</c:v>
+                </c:pt>
+                <c:pt idx="2">
+                  <c:v>Consultant</c:v>
+                </c:pt>
+              </c:strCache>
+            </c:strRef>
+          </c:cat>
+          <c:val>
+            <c:numRef>
+              <c:f>Sheet1!$C$2:$C$4</c:f>
+              <c:numCache>
+                <c:formatCode>General</c:formatCode>
+                <c:ptCount val="3"/>
+                <c:pt idx="0">
+                  <c:v>0.85</c:v>
+                </c:pt>
+                <c:pt idx="1">
+                  <c:v>0.84</c:v>
+                </c:pt>
+                <c:pt idx="2">
+                  <c:v>0.84</c:v>
+                </c:pt>
+              </c:numCache>
+            </c:numRef>
+          </c:val>
+        </c:ser>
+        <c:ser>
+          <c:idx val="2"/>
+          <c:order val="2"/>
+          <c:tx>
+            <c:strRef>
+              <c:f>Sheet1!$D$1</c:f>
+              <c:strCache>
+                <c:ptCount val="1"/>
+                <c:pt idx="0">
+                  <c:v>Doctor + AI</c:v>
+                </c:pt>
+              </c:strCache>
+            </c:strRef>
+          </c:tx>
+          <c:spPr>
+            <a:solidFill>
+              <a:schemeClr val="accent1"/>
+            </a:solidFill>
+          </c:spPr>
+          <c:cat>
+            <c:strRef>
+              <c:f>Sheet1!$A$2:$A$4</c:f>
+              <c:strCache>
+                <c:ptCount val="3"/>
+                <c:pt idx="0">
+                  <c:v>Trainee</c:v>
+                </c:pt>
+                <c:pt idx="1">
+                  <c:v>Registrar</c:v>
+                </c:pt>
+                <c:pt idx="2">
+                  <c:v>Consultant</c:v>
+                </c:pt>
+              </c:strCache>
+            </c:strRef>
+          </c:cat>
+          <c:val>
+            <c:numRef>
+              <c:f>Sheet1!$D$2:$D$4</c:f>
+              <c:numCache>
+                <c:formatCode>General</c:formatCode>
+                <c:ptCount val="3"/>
+                <c:pt idx="0">
+                  <c:v>0.93</c:v>
+                </c:pt>
+                <c:pt idx="1">
+                  <c:v>0.94</c:v>
+                </c:pt>
+                <c:pt idx="2">
+                  <c:v>0.95</c:v>
+                </c:pt>
+              </c:numCache>
+            </c:numRef>
+          </c:val>
+        </c:ser>
+        <c:dLbls>
+          <c:numFmt formatCode="0.00" sourceLinked="0"/>
+          <c:txPr>
+            <a:bodyPr/>
+            <a:lstStyle/>
+            <a:p>
+              <a:pPr>
+                <a:defRPr sz="1100"/>
+              </a:pPr>
+            </a:p>
+          </c:txPr>
+          <c:dLblPos val="outEnd"/>
+          <c:showLegendKey val="0"/>
+          <c:showVal val="1"/>
+          <c:showCatName val="0"/>
+          <c:showSerName val="0"/>
+          <c:showPercent val="0"/>
+          <c:showBubbleSize val="0"/>
+          <c:showLeaderLines val="1"/>
+        </c:dLbls>
+        <c:gapWidth val="60"/>
+        <c:axId val="-2068027336"/>
+        <c:axId val="-2113994440"/>
+      </c:barChart>
+      <c:catAx>
+        <c:axId val="-2068027336"/>
+        <c:scaling>
+          <c:orientation val="minMax"/>
+        </c:scaling>
+        <c:delete val="0"/>
+        <c:axPos val="b"/>
+        <c:majorTickMark val="out"/>
+        <c:minorTickMark val="none"/>
+        <c:tickLblPos val="nextTo"/>
+        <c:txPr>
+          <a:bodyPr/>
+          <a:lstStyle/>
+          <a:p>
+            <a:pPr>
+              <a:defRPr sz="1200"/>
+            </a:pPr>
+          </a:p>
+        </c:txPr>
+        <c:crossAx val="-2113994440"/>
+        <c:crosses val="autoZero"/>
+        <c:auto val="1"/>
+        <c:lblAlgn val="ctr"/>
+        <c:lblOffset val="100"/>
+        <c:noMultiLvlLbl val="0"/>
+      </c:catAx>
+      <c:valAx>
+        <c:axId val="-2113994440"/>
+        <c:scaling>
+          <c:max val="1.0"/>
+          <c:min val="0.5"/>
+        </c:scaling>
+        <c:delete val="0"/>
+        <c:axPos val="l"/>
+        <c:majorGridlines>
+          <c:spPr>
+            <a:ln>
+              <a:solidFill>
+                <a:srgbClr val="E5E7EB"/>
+              </a:solidFill>
+            </a:ln>
+          </c:spPr>
+        </c:majorGridlines>
+        <c:majorTickMark val="out"/>
+        <c:minorTickMark val="none"/>
+        <c:tickLblPos val="nextTo"/>
         <c:txPr>
           <a:bodyPr/>
           <a:lstStyle/>
@@ -9374,6 +9664,604 @@
           <a:lstStyle/>
           <a:p>
             <a:r>
+              <a:t>AI Stack: ML · DL · Generative AI</a:t>
+            </a:r>
+          </a:p>
+        </p:txBody>
+      </p:sp>
+      <p:pic>
+        <p:nvPicPr>
+          <p:cNvPr id="3" name="Picture 2" descr="image.png"/>
+          <p:cNvPicPr>
+            <a:picLocks noChangeAspect="1"/>
+          </p:cNvPicPr>
+          <p:nvPr/>
+        </p:nvPicPr>
+        <p:blipFill>
+          <a:blip r:embed="rId2"/>
+          <a:stretch>
+            <a:fillRect/>
+          </a:stretch>
+        </p:blipFill>
+        <p:spPr>
+          <a:xfrm>
+            <a:off x="9937301" y="243840"/>
+            <a:ext cx="1790699" cy="488373"/>
+          </a:xfrm>
+          <a:prstGeom prst="rect">
+            <a:avLst/>
+          </a:prstGeom>
+        </p:spPr>
+      </p:pic>
+      <p:sp>
+        <p:nvSpPr>
+          <p:cNvPr id="4" name="MACHINE LEARNING head"/>
+          <p:cNvSpPr/>
+          <p:nvPr/>
+        </p:nvSpPr>
+        <p:spPr>
+          <a:xfrm>
+            <a:off x="502920" y="1188720"/>
+            <a:ext cx="3621024" cy="566928"/>
+          </a:xfrm>
+          <a:prstGeom prst="rect">
+            <a:avLst/>
+          </a:prstGeom>
+          <a:solidFill>
+            <a:schemeClr val="accent1"/>
+          </a:solidFill>
+          <a:ln>
+            <a:noFill/>
+          </a:ln>
+          <a:effectLst/>
+        </p:spPr>
+        <p:style>
+          <a:lnRef idx="1">
+            <a:schemeClr val="accent1"/>
+          </a:lnRef>
+          <a:fillRef idx="3">
+            <a:schemeClr val="accent1"/>
+          </a:fillRef>
+          <a:effectRef idx="2">
+            <a:schemeClr val="accent1"/>
+          </a:effectRef>
+          <a:fontRef idx="minor">
+            <a:schemeClr val="lt1"/>
+          </a:fontRef>
+        </p:style>
+        <p:txBody>
+          <a:bodyPr rtlCol="0" anchor="ctr" wrap="square" lIns="54864" rIns="54864" tIns="54864" bIns="54864"/>
+          <a:lstStyle/>
+          <a:p>
+            <a:pPr algn="ctr"/>
+            <a:r>
+              <a:rPr sz="1600" b="1">
+                <a:solidFill>
+                  <a:srgbClr val="FFFFFF"/>
+                </a:solidFill>
+              </a:rPr>
+              <a:t>MACHINE LEARNING</a:t>
+            </a:r>
+          </a:p>
+        </p:txBody>
+      </p:sp>
+      <p:sp>
+        <p:nvSpPr>
+          <p:cNvPr id="5" name="MACHINE LEARNING body"/>
+          <p:cNvSpPr/>
+          <p:nvPr/>
+        </p:nvSpPr>
+        <p:spPr>
+          <a:xfrm>
+            <a:off x="502920" y="1847088"/>
+            <a:ext cx="3621024" cy="3246120"/>
+          </a:xfrm>
+          <a:prstGeom prst="roundRect">
+            <a:avLst>
+              <a:gd name="adj" fmla="val 12000"/>
+            </a:avLst>
+          </a:prstGeom>
+          <a:solidFill>
+            <a:srgbClr val="E8F1F6"/>
+          </a:solidFill>
+          <a:ln>
+            <a:noFill/>
+          </a:ln>
+          <a:effectLst/>
+        </p:spPr>
+        <p:style>
+          <a:lnRef idx="1">
+            <a:schemeClr val="accent1"/>
+          </a:lnRef>
+          <a:fillRef idx="3">
+            <a:schemeClr val="accent1"/>
+          </a:fillRef>
+          <a:effectRef idx="2">
+            <a:schemeClr val="accent1"/>
+          </a:effectRef>
+          <a:fontRef idx="minor">
+            <a:schemeClr val="lt1"/>
+          </a:fontRef>
+        </p:style>
+        <p:txBody>
+          <a:bodyPr rtlCol="0" anchor="ctr" wrap="square" lIns="164592" rIns="164592" tIns="164592" bIns="164592"/>
+          <a:lstStyle/>
+          <a:p>
+            <a:pPr algn="l" marL="146304" indent="-128016">
+              <a:spcAft>
+                <a:spcPts val="800"/>
+              </a:spcAft>
+              <a:buChar char="•"/>
+            </a:pPr>
+            <a:r>
+              <a:rPr sz="1500" b="0">
+                <a:solidFill>
+                  <a:srgbClr val="0E2841"/>
+                </a:solidFill>
+              </a:rPr>
+              <a:t>Feedback-trained logistic model</a:t>
+            </a:r>
+          </a:p>
+          <a:p>
+            <a:pPr algn="l" marL="146304" indent="-128016">
+              <a:spcAft>
+                <a:spcPts val="800"/>
+              </a:spcAft>
+              <a:buChar char="•"/>
+            </a:pPr>
+            <a:r>
+              <a:rPr sz="1500" b="0">
+                <a:solidFill>
+                  <a:srgbClr val="0E2841"/>
+                </a:solidFill>
+              </a:rPr>
+              <a:t>Learns from Accept / Correct / Reject / Add</a:t>
+            </a:r>
+          </a:p>
+          <a:p>
+            <a:pPr algn="l" marL="146304" indent="-128016">
+              <a:spcAft>
+                <a:spcPts val="800"/>
+              </a:spcAft>
+              <a:buChar char="•"/>
+            </a:pPr>
+            <a:r>
+              <a:rPr sz="1500" b="0">
+                <a:solidFill>
+                  <a:srgbClr val="0E2841"/>
+                </a:solidFill>
+              </a:rPr>
+              <a:t>5-fold cross-validated; retrained at every sign-off</a:t>
+            </a:r>
+          </a:p>
+          <a:p>
+            <a:pPr algn="l" marL="146304" indent="-128016">
+              <a:spcAft>
+                <a:spcPts val="800"/>
+              </a:spcAft>
+              <a:buChar char="•"/>
+            </a:pPr>
+            <a:r>
+              <a:rPr sz="1500" b="0">
+                <a:solidFill>
+                  <a:srgbClr val="0E2841"/>
+                </a:solidFill>
+              </a:rPr>
+              <a:t>Calibrated: temperature scaling + subgroup thresholds (bias reduction)</a:t>
+            </a:r>
+          </a:p>
+        </p:txBody>
+      </p:sp>
+      <p:sp>
+        <p:nvSpPr>
+          <p:cNvPr id="6" name="DEEP LEARNING head"/>
+          <p:cNvSpPr/>
+          <p:nvPr/>
+        </p:nvSpPr>
+        <p:spPr>
+          <a:xfrm>
+            <a:off x="4306824" y="1188720"/>
+            <a:ext cx="3621024" cy="566928"/>
+          </a:xfrm>
+          <a:prstGeom prst="rect">
+            <a:avLst/>
+          </a:prstGeom>
+          <a:solidFill>
+            <a:schemeClr val="accent1"/>
+          </a:solidFill>
+          <a:ln>
+            <a:noFill/>
+          </a:ln>
+          <a:effectLst/>
+        </p:spPr>
+        <p:style>
+          <a:lnRef idx="1">
+            <a:schemeClr val="accent1"/>
+          </a:lnRef>
+          <a:fillRef idx="3">
+            <a:schemeClr val="accent1"/>
+          </a:fillRef>
+          <a:effectRef idx="2">
+            <a:schemeClr val="accent1"/>
+          </a:effectRef>
+          <a:fontRef idx="minor">
+            <a:schemeClr val="lt1"/>
+          </a:fontRef>
+        </p:style>
+        <p:txBody>
+          <a:bodyPr rtlCol="0" anchor="ctr" wrap="square" lIns="54864" rIns="54864" tIns="54864" bIns="54864"/>
+          <a:lstStyle/>
+          <a:p>
+            <a:pPr algn="ctr"/>
+            <a:r>
+              <a:rPr sz="1600" b="1">
+                <a:solidFill>
+                  <a:srgbClr val="FFFFFF"/>
+                </a:solidFill>
+              </a:rPr>
+              <a:t>DEEP LEARNING</a:t>
+            </a:r>
+          </a:p>
+        </p:txBody>
+      </p:sp>
+      <p:sp>
+        <p:nvSpPr>
+          <p:cNvPr id="7" name="DEEP LEARNING body"/>
+          <p:cNvSpPr/>
+          <p:nvPr/>
+        </p:nvSpPr>
+        <p:spPr>
+          <a:xfrm>
+            <a:off x="4306824" y="1847088"/>
+            <a:ext cx="3621024" cy="3246120"/>
+          </a:xfrm>
+          <a:prstGeom prst="roundRect">
+            <a:avLst>
+              <a:gd name="adj" fmla="val 12000"/>
+            </a:avLst>
+          </a:prstGeom>
+          <a:solidFill>
+            <a:srgbClr val="E8F1F6"/>
+          </a:solidFill>
+          <a:ln>
+            <a:noFill/>
+          </a:ln>
+          <a:effectLst/>
+        </p:spPr>
+        <p:style>
+          <a:lnRef idx="1">
+            <a:schemeClr val="accent1"/>
+          </a:lnRef>
+          <a:fillRef idx="3">
+            <a:schemeClr val="accent1"/>
+          </a:fillRef>
+          <a:effectRef idx="2">
+            <a:schemeClr val="accent1"/>
+          </a:effectRef>
+          <a:fontRef idx="minor">
+            <a:schemeClr val="lt1"/>
+          </a:fontRef>
+        </p:style>
+        <p:txBody>
+          <a:bodyPr rtlCol="0" anchor="ctr" wrap="square" lIns="164592" rIns="164592" tIns="164592" bIns="164592"/>
+          <a:lstStyle/>
+          <a:p>
+            <a:pPr algn="l" marL="146304" indent="-128016">
+              <a:spcAft>
+                <a:spcPts val="800"/>
+              </a:spcAft>
+              <a:buChar char="•"/>
+            </a:pPr>
+            <a:r>
+              <a:rPr sz="1500" b="0">
+                <a:solidFill>
+                  <a:srgbClr val="0E2841"/>
+                </a:solidFill>
+              </a:rPr>
+              <a:t>DenseNet-121 (TorchXRayVision): 18 findings</a:t>
+            </a:r>
+          </a:p>
+          <a:p>
+            <a:pPr algn="l" marL="146304" indent="-128016">
+              <a:spcAft>
+                <a:spcPts val="800"/>
+              </a:spcAft>
+              <a:buChar char="•"/>
+            </a:pPr>
+            <a:r>
+              <a:rPr sz="1500" b="0">
+                <a:solidFill>
+                  <a:srgbClr val="0E2841"/>
+                </a:solidFill>
+              </a:rPr>
+              <a:t>PSPNet: lung + heart segmentation</a:t>
+            </a:r>
+          </a:p>
+          <a:p>
+            <a:pPr algn="l" marL="146304" indent="-128016">
+              <a:spcAft>
+                <a:spcPts val="800"/>
+              </a:spcAft>
+              <a:buChar char="•"/>
+            </a:pPr>
+            <a:r>
+              <a:rPr sz="1500" b="0">
+                <a:solidFill>
+                  <a:srgbClr val="0E2841"/>
+                </a:solidFill>
+              </a:rPr>
+              <a:t>Grad-CAM heatmaps for routed findings</a:t>
+            </a:r>
+          </a:p>
+          <a:p>
+            <a:pPr algn="l" marL="146304" indent="-128016">
+              <a:spcAft>
+                <a:spcPts val="800"/>
+              </a:spcAft>
+              <a:buChar char="•"/>
+            </a:pPr>
+            <a:r>
+              <a:rPr sz="1500" b="0">
+                <a:solidFill>
+                  <a:srgbClr val="0E2841"/>
+                </a:solidFill>
+              </a:rPr>
+              <a:t>Fused with measurements (CTR, zones, angles)</a:t>
+            </a:r>
+          </a:p>
+        </p:txBody>
+      </p:sp>
+      <p:sp>
+        <p:nvSpPr>
+          <p:cNvPr id="8" name="GENERATIVE AI head"/>
+          <p:cNvSpPr/>
+          <p:nvPr/>
+        </p:nvSpPr>
+        <p:spPr>
+          <a:xfrm>
+            <a:off x="8110728" y="1188720"/>
+            <a:ext cx="3621024" cy="566928"/>
+          </a:xfrm>
+          <a:prstGeom prst="rect">
+            <a:avLst/>
+          </a:prstGeom>
+          <a:solidFill>
+            <a:schemeClr val="accent1"/>
+          </a:solidFill>
+          <a:ln>
+            <a:noFill/>
+          </a:ln>
+          <a:effectLst/>
+        </p:spPr>
+        <p:style>
+          <a:lnRef idx="1">
+            <a:schemeClr val="accent1"/>
+          </a:lnRef>
+          <a:fillRef idx="3">
+            <a:schemeClr val="accent1"/>
+          </a:fillRef>
+          <a:effectRef idx="2">
+            <a:schemeClr val="accent1"/>
+          </a:effectRef>
+          <a:fontRef idx="minor">
+            <a:schemeClr val="lt1"/>
+          </a:fontRef>
+        </p:style>
+        <p:txBody>
+          <a:bodyPr rtlCol="0" anchor="ctr" wrap="square" lIns="54864" rIns="54864" tIns="54864" bIns="54864"/>
+          <a:lstStyle/>
+          <a:p>
+            <a:pPr algn="ctr"/>
+            <a:r>
+              <a:rPr sz="1600" b="1">
+                <a:solidFill>
+                  <a:srgbClr val="FFFFFF"/>
+                </a:solidFill>
+              </a:rPr>
+              <a:t>GENERATIVE AI</a:t>
+            </a:r>
+          </a:p>
+        </p:txBody>
+      </p:sp>
+      <p:sp>
+        <p:nvSpPr>
+          <p:cNvPr id="9" name="GENERATIVE AI body"/>
+          <p:cNvSpPr/>
+          <p:nvPr/>
+        </p:nvSpPr>
+        <p:spPr>
+          <a:xfrm>
+            <a:off x="8110728" y="1847088"/>
+            <a:ext cx="3621024" cy="3246120"/>
+          </a:xfrm>
+          <a:prstGeom prst="roundRect">
+            <a:avLst>
+              <a:gd name="adj" fmla="val 12000"/>
+            </a:avLst>
+          </a:prstGeom>
+          <a:solidFill>
+            <a:srgbClr val="E8F1F6"/>
+          </a:solidFill>
+          <a:ln>
+            <a:noFill/>
+          </a:ln>
+          <a:effectLst/>
+        </p:spPr>
+        <p:style>
+          <a:lnRef idx="1">
+            <a:schemeClr val="accent1"/>
+          </a:lnRef>
+          <a:fillRef idx="3">
+            <a:schemeClr val="accent1"/>
+          </a:fillRef>
+          <a:effectRef idx="2">
+            <a:schemeClr val="accent1"/>
+          </a:effectRef>
+          <a:fontRef idx="minor">
+            <a:schemeClr val="lt1"/>
+          </a:fontRef>
+        </p:style>
+        <p:txBody>
+          <a:bodyPr rtlCol="0" anchor="ctr" wrap="square" lIns="164592" rIns="164592" tIns="164592" bIns="164592"/>
+          <a:lstStyle/>
+          <a:p>
+            <a:pPr algn="l" marL="146304" indent="-128016">
+              <a:spcAft>
+                <a:spcPts val="800"/>
+              </a:spcAft>
+              <a:buChar char="•"/>
+            </a:pPr>
+            <a:r>
+              <a:rPr sz="1500" b="0">
+                <a:solidFill>
+                  <a:srgbClr val="0E2841"/>
+                </a:solidFill>
+              </a:rPr>
+              <a:t>Draft radiology report: findings, impression, next steps</a:t>
+            </a:r>
+          </a:p>
+          <a:p>
+            <a:pPr algn="l" marL="146304" indent="-128016">
+              <a:spcAft>
+                <a:spcPts val="800"/>
+              </a:spcAft>
+              <a:buChar char="•"/>
+            </a:pPr>
+            <a:r>
+              <a:rPr sz="1500" b="0">
+                <a:solidFill>
+                  <a:srgbClr val="0E2841"/>
+                </a:solidFill>
+              </a:rPr>
+              <a:t>Medical RAG: cited guideline passages</a:t>
+            </a:r>
+          </a:p>
+          <a:p>
+            <a:pPr algn="l" marL="146304" indent="-128016">
+              <a:spcAft>
+                <a:spcPts val="800"/>
+              </a:spcAft>
+              <a:buChar char="•"/>
+            </a:pPr>
+            <a:r>
+              <a:rPr sz="1500" b="0">
+                <a:solidFill>
+                  <a:srgbClr val="0E2841"/>
+                </a:solidFill>
+              </a:rPr>
+              <a:t>Explanation depth set by the doctor's chosen mode</a:t>
+            </a:r>
+          </a:p>
+          <a:p>
+            <a:pPr algn="l" marL="146304" indent="-128016">
+              <a:spcAft>
+                <a:spcPts val="800"/>
+              </a:spcAft>
+              <a:buChar char="•"/>
+            </a:pPr>
+            <a:r>
+              <a:rPr sz="1500" b="0">
+                <a:solidFill>
+                  <a:srgbClr val="0E2841"/>
+                </a:solidFill>
+              </a:rPr>
+              <a:t>Fact-checked: invented numbers or findings are rejected</a:t>
+            </a:r>
+          </a:p>
+        </p:txBody>
+      </p:sp>
+      <p:sp>
+        <p:nvSpPr>
+          <p:cNvPr id="10" name="Stack flow"/>
+          <p:cNvSpPr/>
+          <p:nvPr/>
+        </p:nvSpPr>
+        <p:spPr>
+          <a:xfrm>
+            <a:off x="502920" y="5303520"/>
+            <a:ext cx="11155680" cy="960120"/>
+          </a:xfrm>
+          <a:prstGeom prst="rect">
+            <a:avLst/>
+          </a:prstGeom>
+          <a:noFill/>
+          <a:ln>
+            <a:noFill/>
+          </a:ln>
+          <a:effectLst/>
+        </p:spPr>
+        <p:style>
+          <a:lnRef idx="1">
+            <a:schemeClr val="accent1"/>
+          </a:lnRef>
+          <a:fillRef idx="3">
+            <a:schemeClr val="accent1"/>
+          </a:fillRef>
+          <a:effectRef idx="2">
+            <a:schemeClr val="accent1"/>
+          </a:effectRef>
+          <a:fontRef idx="minor">
+            <a:schemeClr val="lt1"/>
+          </a:fontRef>
+        </p:style>
+        <p:txBody>
+          <a:bodyPr rtlCol="0" anchor="t" wrap="square" lIns="54864" rIns="54864" tIns="54864" bIns="54864"/>
+          <a:lstStyle/>
+          <a:p>
+            <a:pPr algn="l"/>
+            <a:r>
+              <a:rPr sz="1500" b="1">
+                <a:solidFill>
+                  <a:srgbClr val="0E2841"/>
+                </a:solidFill>
+              </a:rPr>
+              <a:t>Recommendation engine</a:t>
+            </a:r>
+            <a:r>
+              <a:rPr sz="1500" b="0">
+                <a:solidFill>
+                  <a:srgbClr val="0E2841"/>
+                </a:solidFill>
+              </a:rPr>
+              <a:t> on top: urgency tier, next test, follow-up and referral per finding, adjusted for confidence, nodule size, clinical context and patterns across findings (e.g. cardiomegaly + effusion → one heart-failure work-up).</a:t>
+            </a:r>
+          </a:p>
+        </p:txBody>
+      </p:sp>
+    </p:spTree>
+  </p:cSld>
+  <p:clrMapOvr>
+    <a:masterClrMapping/>
+  </p:clrMapOvr>
+</p:sld>
+</file>
+
+<file path=ppt/slides/slide12.xml><?xml version="1.0" encoding="utf-8"?>
+<p:sld xmlns:a="http://schemas.openxmlformats.org/drawingml/2006/main" xmlns:p="http://schemas.openxmlformats.org/presentationml/2006/main" xmlns:r="http://schemas.openxmlformats.org/officeDocument/2006/relationships">
+  <p:cSld>
+    <p:spTree>
+      <p:nvGrpSpPr>
+        <p:cNvPr id="1" name=""/>
+        <p:cNvGrpSpPr/>
+        <p:nvPr/>
+      </p:nvGrpSpPr>
+      <p:grpSpPr/>
+      <p:sp>
+        <p:nvSpPr>
+          <p:cNvPr id="2" name="Title 1"/>
+          <p:cNvSpPr>
+            <a:spLocks noGrp="1"/>
+          </p:cNvSpPr>
+          <p:nvPr>
+            <p:ph type="title"/>
+          </p:nvPr>
+        </p:nvSpPr>
+        <p:spPr/>
+        <p:txBody>
+          <a:bodyPr/>
+          <a:lstStyle/>
+          <a:p>
+            <a:r>
               <a:t>Prototype Results</a:t>
             </a:r>
           </a:p>
@@ -9797,7 +10685,456 @@
 </p:sld>
 </file>
 
-<file path=ppt/slides/slide12.xml><?xml version="1.0" encoding="utf-8"?>
+<file path=ppt/slides/slide13.xml><?xml version="1.0" encoding="utf-8"?>
+<p:sld xmlns:a="http://schemas.openxmlformats.org/drawingml/2006/main" xmlns:p="http://schemas.openxmlformats.org/presentationml/2006/main" xmlns:r="http://schemas.openxmlformats.org/officeDocument/2006/relationships">
+  <p:cSld>
+    <p:spTree>
+      <p:nvGrpSpPr>
+        <p:cNvPr id="1" name=""/>
+        <p:cNvGrpSpPr/>
+        <p:nvPr/>
+      </p:nvGrpSpPr>
+      <p:grpSpPr/>
+      <p:sp>
+        <p:nvSpPr>
+          <p:cNvPr id="2" name="Title 1"/>
+          <p:cNvSpPr>
+            <a:spLocks noGrp="1"/>
+          </p:cNvSpPr>
+          <p:nvPr>
+            <p:ph type="title"/>
+          </p:nvPr>
+        </p:nvSpPr>
+        <p:spPr/>
+        <p:txBody>
+          <a:bodyPr/>
+          <a:lstStyle/>
+          <a:p>
+            <a:r>
+              <a:t>Doctor + AI Results</a:t>
+            </a:r>
+          </a:p>
+        </p:txBody>
+      </p:sp>
+      <p:pic>
+        <p:nvPicPr>
+          <p:cNvPr id="3" name="Picture 2" descr="image.png"/>
+          <p:cNvPicPr>
+            <a:picLocks noChangeAspect="1"/>
+          </p:cNvPicPr>
+          <p:nvPr/>
+        </p:nvPicPr>
+        <p:blipFill>
+          <a:blip r:embed="rId2"/>
+          <a:stretch>
+            <a:fillRect/>
+          </a:stretch>
+        </p:blipFill>
+        <p:spPr>
+          <a:xfrm>
+            <a:off x="9937301" y="243840"/>
+            <a:ext cx="1790699" cy="488373"/>
+          </a:xfrm>
+          <a:prstGeom prst="rect">
+            <a:avLst/>
+          </a:prstGeom>
+        </p:spPr>
+      </p:pic>
+      <p:graphicFrame>
+        <p:nvGraphicFramePr>
+          <p:cNvPr id="4" name="Chart 3"/>
+          <p:cNvGraphicFramePr>
+            <a:graphicFrameLocks noGrp="1"/>
+          </p:cNvGraphicFramePr>
+          <p:nvPr/>
+        </p:nvGraphicFramePr>
+        <p:xfrm>
+          <a:off x="502920" y="1143000"/>
+          <a:ext cx="6675120" cy="4343400"/>
+        </p:xfrm>
+        <a:graphic>
+          <a:graphicData uri="http://schemas.openxmlformats.org/drawingml/2006/chart">
+            <c:chart xmlns:c="http://schemas.openxmlformats.org/drawingml/2006/chart" r:id="rId3"/>
+          </a:graphicData>
+        </a:graphic>
+      </p:graphicFrame>
+      <p:sp>
+        <p:nvSpPr>
+          <p:cNvPr id="5" name="Chart caption"/>
+          <p:cNvSpPr/>
+          <p:nvPr/>
+        </p:nvSpPr>
+        <p:spPr>
+          <a:xfrm>
+            <a:off x="502920" y="5532120"/>
+            <a:ext cx="6675120" cy="457200"/>
+          </a:xfrm>
+          <a:prstGeom prst="rect">
+            <a:avLst/>
+          </a:prstGeom>
+          <a:noFill/>
+          <a:ln>
+            <a:noFill/>
+          </a:ln>
+          <a:effectLst/>
+        </p:spPr>
+        <p:style>
+          <a:lnRef idx="1">
+            <a:schemeClr val="accent1"/>
+          </a:lnRef>
+          <a:fillRef idx="3">
+            <a:schemeClr val="accent1"/>
+          </a:fillRef>
+          <a:effectRef idx="2">
+            <a:schemeClr val="accent1"/>
+          </a:effectRef>
+          <a:fontRef idx="minor">
+            <a:schemeClr val="lt1"/>
+          </a:fontRef>
+        </p:style>
+        <p:txBody>
+          <a:bodyPr rtlCol="0" anchor="t" wrap="square" lIns="54864" rIns="54864" tIns="54864" bIns="54864"/>
+          <a:lstStyle/>
+          <a:p>
+            <a:pPr algn="l"/>
+            <a:r>
+              <a:rPr sz="1100" b="0">
+                <a:solidFill>
+                  <a:srgbClr val="555F6B"/>
+                </a:solidFill>
+              </a:rPr>
+              <a:t>Accuracy · simulated readers who follow the AI only when its confidence ≥ 0.75 · AI at real-world 15% error</a:t>
+            </a:r>
+          </a:p>
+        </p:txBody>
+      </p:sp>
+      <p:sp>
+        <p:nvSpPr>
+          <p:cNvPr id="6" name="Team stat 1"/>
+          <p:cNvSpPr/>
+          <p:nvPr/>
+        </p:nvSpPr>
+        <p:spPr>
+          <a:xfrm>
+            <a:off x="7543800" y="1188720"/>
+            <a:ext cx="4114800" cy="1097280"/>
+          </a:xfrm>
+          <a:prstGeom prst="roundRect">
+            <a:avLst>
+              <a:gd name="adj" fmla="val 12000"/>
+            </a:avLst>
+          </a:prstGeom>
+          <a:solidFill>
+            <a:srgbClr val="E8F1F6"/>
+          </a:solidFill>
+          <a:ln>
+            <a:noFill/>
+          </a:ln>
+          <a:effectLst/>
+        </p:spPr>
+        <p:style>
+          <a:lnRef idx="1">
+            <a:schemeClr val="accent1"/>
+          </a:lnRef>
+          <a:fillRef idx="3">
+            <a:schemeClr val="accent1"/>
+          </a:fillRef>
+          <a:effectRef idx="2">
+            <a:schemeClr val="accent1"/>
+          </a:effectRef>
+          <a:fontRef idx="minor">
+            <a:schemeClr val="lt1"/>
+          </a:fontRef>
+        </p:style>
+        <p:txBody>
+          <a:bodyPr rtlCol="0" anchor="ctr" wrap="square" lIns="54864" rIns="54864" tIns="54864" bIns="54864"/>
+          <a:lstStyle/>
+          <a:p>
+            <a:pPr algn="ctr"/>
+            <a:r>
+              <a:rPr sz="2400" b="1">
+                <a:solidFill>
+                  <a:schemeClr val="accent1"/>
+                </a:solidFill>
+              </a:rPr>
+              <a:t>0.27 vs 0.86</a:t>
+            </a:r>
+          </a:p>
+          <a:p>
+            <a:pPr algn="ctr"/>
+            <a:r>
+              <a:rPr sz="1200" b="0">
+                <a:solidFill>
+                  <a:srgbClr val="0E2841"/>
+                </a:solidFill>
+              </a:rPr>
+              <a:t>automation bias: confidence-guided vs over-trusting readers</a:t>
+            </a:r>
+          </a:p>
+        </p:txBody>
+      </p:sp>
+      <p:sp>
+        <p:nvSpPr>
+          <p:cNvPr id="7" name="Team stat 2"/>
+          <p:cNvSpPr/>
+          <p:nvPr/>
+        </p:nvSpPr>
+        <p:spPr>
+          <a:xfrm>
+            <a:off x="7543800" y="2395728"/>
+            <a:ext cx="4114800" cy="1097280"/>
+          </a:xfrm>
+          <a:prstGeom prst="roundRect">
+            <a:avLst>
+              <a:gd name="adj" fmla="val 12000"/>
+            </a:avLst>
+          </a:prstGeom>
+          <a:solidFill>
+            <a:srgbClr val="E8F1F6"/>
+          </a:solidFill>
+          <a:ln>
+            <a:noFill/>
+          </a:ln>
+          <a:effectLst/>
+        </p:spPr>
+        <p:style>
+          <a:lnRef idx="1">
+            <a:schemeClr val="accent1"/>
+          </a:lnRef>
+          <a:fillRef idx="3">
+            <a:schemeClr val="accent1"/>
+          </a:fillRef>
+          <a:effectRef idx="2">
+            <a:schemeClr val="accent1"/>
+          </a:effectRef>
+          <a:fontRef idx="minor">
+            <a:schemeClr val="lt1"/>
+          </a:fontRef>
+        </p:style>
+        <p:txBody>
+          <a:bodyPr rtlCol="0" anchor="ctr" wrap="square" lIns="54864" rIns="54864" tIns="54864" bIns="54864"/>
+          <a:lstStyle/>
+          <a:p>
+            <a:pPr algn="ctr"/>
+            <a:r>
+              <a:rPr sz="2400" b="1">
+                <a:solidFill>
+                  <a:schemeClr val="accent1"/>
+                </a:solidFill>
+              </a:rPr>
+              <a:t>0.89</a:t>
+            </a:r>
+          </a:p>
+          <a:p>
+            <a:pPr algn="ctr"/>
+            <a:r>
+              <a:rPr sz="1200" b="0">
+                <a:solidFill>
+                  <a:srgbClr val="0E2841"/>
+                </a:solidFill>
+              </a:rPr>
+              <a:t>rescue rate: doctor errors fixed by a correct AI call</a:t>
+            </a:r>
+          </a:p>
+        </p:txBody>
+      </p:sp>
+      <p:sp>
+        <p:nvSpPr>
+          <p:cNvPr id="8" name="Team stat 3"/>
+          <p:cNvSpPr/>
+          <p:nvPr/>
+        </p:nvSpPr>
+        <p:spPr>
+          <a:xfrm>
+            <a:off x="7543800" y="3602736"/>
+            <a:ext cx="4114800" cy="1097280"/>
+          </a:xfrm>
+          <a:prstGeom prst="roundRect">
+            <a:avLst>
+              <a:gd name="adj" fmla="val 12000"/>
+            </a:avLst>
+          </a:prstGeom>
+          <a:solidFill>
+            <a:srgbClr val="E8F1F6"/>
+          </a:solidFill>
+          <a:ln>
+            <a:noFill/>
+          </a:ln>
+          <a:effectLst/>
+        </p:spPr>
+        <p:style>
+          <a:lnRef idx="1">
+            <a:schemeClr val="accent1"/>
+          </a:lnRef>
+          <a:fillRef idx="3">
+            <a:schemeClr val="accent1"/>
+          </a:fillRef>
+          <a:effectRef idx="2">
+            <a:schemeClr val="accent1"/>
+          </a:effectRef>
+          <a:fontRef idx="minor">
+            <a:schemeClr val="lt1"/>
+          </a:fontRef>
+        </p:style>
+        <p:txBody>
+          <a:bodyPr rtlCol="0" anchor="ctr" wrap="square" lIns="54864" rIns="54864" tIns="54864" bIns="54864"/>
+          <a:lstStyle/>
+          <a:p>
+            <a:pPr algn="ctr"/>
+            <a:r>
+              <a:rPr sz="2400" b="1">
+                <a:solidFill>
+                  <a:schemeClr val="accent1"/>
+                </a:solidFill>
+              </a:rPr>
+              <a:t>0.80</a:t>
+            </a:r>
+          </a:p>
+          <a:p>
+            <a:pPr algn="ctr"/>
+            <a:r>
+              <a:rPr sz="1200" b="0">
+                <a:solidFill>
+                  <a:srgbClr val="0E2841"/>
+                </a:solidFill>
+              </a:rPr>
+              <a:t>pneumonia sensitivity on 50 real chest X-rays (AUC 0.74)</a:t>
+            </a:r>
+          </a:p>
+        </p:txBody>
+      </p:sp>
+      <p:sp>
+        <p:nvSpPr>
+          <p:cNvPr id="9" name="Team stat 4"/>
+          <p:cNvSpPr/>
+          <p:nvPr/>
+        </p:nvSpPr>
+        <p:spPr>
+          <a:xfrm>
+            <a:off x="7543800" y="4809744"/>
+            <a:ext cx="4114800" cy="1097280"/>
+          </a:xfrm>
+          <a:prstGeom prst="roundRect">
+            <a:avLst>
+              <a:gd name="adj" fmla="val 12000"/>
+            </a:avLst>
+          </a:prstGeom>
+          <a:solidFill>
+            <a:srgbClr val="E8F1F6"/>
+          </a:solidFill>
+          <a:ln>
+            <a:noFill/>
+          </a:ln>
+          <a:effectLst/>
+        </p:spPr>
+        <p:style>
+          <a:lnRef idx="1">
+            <a:schemeClr val="accent1"/>
+          </a:lnRef>
+          <a:fillRef idx="3">
+            <a:schemeClr val="accent1"/>
+          </a:fillRef>
+          <a:effectRef idx="2">
+            <a:schemeClr val="accent1"/>
+          </a:effectRef>
+          <a:fontRef idx="minor">
+            <a:schemeClr val="lt1"/>
+          </a:fontRef>
+        </p:style>
+        <p:txBody>
+          <a:bodyPr rtlCol="0" anchor="ctr" wrap="square" lIns="54864" rIns="54864" tIns="54864" bIns="54864"/>
+          <a:lstStyle/>
+          <a:p>
+            <a:pPr algn="ctr"/>
+            <a:r>
+              <a:rPr sz="2400" b="1">
+                <a:solidFill>
+                  <a:schemeClr val="accent1"/>
+                </a:solidFill>
+              </a:rPr>
+              <a:t>49 / 50</a:t>
+            </a:r>
+          </a:p>
+          <a:p>
+            <a:pPr algn="ctr"/>
+            <a:r>
+              <a:rPr sz="1200" b="0">
+                <a:solidFill>
+                  <a:srgbClr val="0E2841"/>
+                </a:solidFill>
+              </a:rPr>
+              <a:t>real films passed the quality gate after learned segmentation</a:t>
+            </a:r>
+          </a:p>
+        </p:txBody>
+      </p:sp>
+      <p:sp>
+        <p:nvSpPr>
+          <p:cNvPr id="10" name="Team note"/>
+          <p:cNvSpPr/>
+          <p:nvPr/>
+        </p:nvSpPr>
+        <p:spPr>
+          <a:xfrm>
+            <a:off x="502920" y="5943600"/>
+            <a:ext cx="11155680" cy="457200"/>
+          </a:xfrm>
+          <a:prstGeom prst="rect">
+            <a:avLst/>
+          </a:prstGeom>
+          <a:noFill/>
+          <a:ln>
+            <a:noFill/>
+          </a:ln>
+          <a:effectLst/>
+        </p:spPr>
+        <p:style>
+          <a:lnRef idx="1">
+            <a:schemeClr val="accent1"/>
+          </a:lnRef>
+          <a:fillRef idx="3">
+            <a:schemeClr val="accent1"/>
+          </a:fillRef>
+          <a:effectRef idx="2">
+            <a:schemeClr val="accent1"/>
+          </a:effectRef>
+          <a:fontRef idx="minor">
+            <a:schemeClr val="lt1"/>
+          </a:fontRef>
+        </p:style>
+        <p:txBody>
+          <a:bodyPr rtlCol="0" anchor="t" wrap="square" lIns="54864" rIns="54864" tIns="54864" bIns="54864"/>
+          <a:lstStyle/>
+          <a:p>
+            <a:pPr algn="l"/>
+            <a:r>
+              <a:rPr sz="1300" b="1">
+                <a:solidFill>
+                  <a:srgbClr val="0E2841"/>
+                </a:solidFill>
+              </a:rPr>
+              <a:t>Doctor + AI beats either alone when the doctor uses the AI's confidence; </a:t>
+            </a:r>
+            <a:r>
+              <a:rPr sz="1300" b="0">
+                <a:solidFill>
+                  <a:srgbClr val="0E2841"/>
+                </a:solidFill>
+              </a:rPr>
+              <a:t>over-trust erases the gain - hence blinded first read and confidence on every finding.</a:t>
+            </a:r>
+          </a:p>
+        </p:txBody>
+      </p:sp>
+    </p:spTree>
+  </p:cSld>
+  <p:clrMapOvr>
+    <a:masterClrMapping/>
+  </p:clrMapOvr>
+</p:sld>
+</file>
+
+<file path=ppt/slides/slide14.xml><?xml version="1.0" encoding="utf-8"?>
 <p:sld xmlns:a="http://schemas.openxmlformats.org/drawingml/2006/main" xmlns:p="http://schemas.openxmlformats.org/presentationml/2006/main" xmlns:r="http://schemas.openxmlformats.org/officeDocument/2006/relationships">
   <p:cSld>
     <p:spTree>
@@ -9854,7 +11191,7 @@
       </p:pic>
       <p:pic>
         <p:nvPicPr>
-          <p:cNvPr id="4" name="Picture 3" descr="04-review.png"/>
+          <p:cNvPr id="4" name="Picture 3" descr="05b-review-guided.png"/>
           <p:cNvPicPr>
             <a:picLocks noChangeAspect="1"/>
           </p:cNvPicPr>
@@ -9926,7 +11263,7 @@
                   <a:srgbClr val="0E2841"/>
                 </a:solidFill>
               </a:rPr>
-              <a:t>Review – heatmap, router decision, quality checks</a:t>
+              <a:t>Review – Guided mode: why it matters, checklist</a:t>
             </a:r>
           </a:p>
         </p:txBody>
@@ -9947,8 +11284,8 @@
         </p:blipFill>
         <p:spPr>
           <a:xfrm>
-            <a:off x="6231636" y="1234440"/>
-            <a:ext cx="5413248" cy="3383280"/>
+            <a:off x="6113221" y="1234440"/>
+            <a:ext cx="5650078" cy="3383280"/>
           </a:xfrm>
           <a:prstGeom prst="rect">
             <a:avLst/>
@@ -10005,7 +11342,7 @@
                   <a:srgbClr val="0E2841"/>
                 </a:solidFill>
               </a:rPr>
-              <a:t>Dashboard – findings, routing, doctor decisions</a:t>
+              <a:t>Dashboard – trend, finding profile, filters</a:t>
             </a:r>
           </a:p>
         </p:txBody>
@@ -10063,7 +11400,7 @@
                   <a:srgbClr val="0E2841"/>
                 </a:solidFill>
               </a:rPr>
-              <a:t>sign-in with clinician and admin workspaces · Analyse with live 8-stage pipeline · Review with Accept / Correct / Reject / Question and blinded first read · Evaluation · Bias Monitor · hash-chained Audit Trail.</a:t>
+              <a:t>doctor-chosen support modes · live 8-stage pipeline · Accept / Correct / Reject / Question · recommendations and draft report · Doctor + AI simulation · bias reduction · hash-chained audit trail.</a:t>
             </a:r>
           </a:p>
         </p:txBody>
@@ -10354,108 +11691,127 @@
               <a:buNone/>
             </a:pPr>
             <a:r>
-              <a:rPr lang="en-IN" sz="2400" dirty="0" b="1"/>
+              <a:rPr lang="en-IN" sz="2000" dirty="0" b="1"/>
               <a:t>MEDSCAN</a:t>
             </a:r>
             <a:r>
-              <a:rPr lang="en-IN" sz="2400" dirty="0"/>
-              <a:t> is a working desktop prototype: a human-in-the-loop chest X-ray assistant built around an </a:t>
-            </a:r>
-            <a:r>
-              <a:rPr lang="en-IN" sz="2400" dirty="0" b="1"/>
+              <a:rPr lang="en-IN" sz="2000" dirty="0"/>
+              <a:t> – a working desktop prototype that adapts to </a:t>
+            </a:r>
+            <a:r>
+              <a:rPr lang="en-IN" sz="2000" dirty="0" b="1"/>
+              <a:t>each doctor's chosen support mode</a:t>
+            </a:r>
+            <a:r>
+              <a:rPr lang="en-IN" sz="2000" dirty="0"/>
+              <a:t> and to the clinical situation, via an </a:t>
+            </a:r>
+            <a:r>
+              <a:rPr lang="en-IN" sz="2000" dirty="0" b="1"/>
               <a:t>Adaptive Analysis Routing layer</a:t>
             </a:r>
             <a:r>
-              <a:rPr lang="en-IN" sz="2400" dirty="0"/>
+              <a:rPr lang="en-IN" sz="2000" dirty="0"/>
               <a:t>.</a:t>
             </a:r>
           </a:p>
           <a:p>
             <a:pPr lvl="0"/>
             <a:r>
-              <a:rPr lang="en-IN" sz="2400" dirty="0" b="1"/>
-              <a:t>Scan Quality Gate</a:t>
-            </a:r>
-            <a:r>
-              <a:rPr lang="en-IN" sz="2400" dirty="0"/>
-              <a:t> – 7 checks; a failed scan stops with “human review” and no findings.</a:t>
+              <a:rPr lang="en-IN" sz="2000" dirty="0" b="1"/>
+              <a:t>Quality Gate</a:t>
+            </a:r>
+            <a:r>
+              <a:rPr lang="en-IN" sz="2000" dirty="0"/>
+              <a:t> – 7 checks; poor or incomplete scans go to a human, with no findings.</a:t>
             </a:r>
           </a:p>
           <a:p>
             <a:pPr lvl="0"/>
             <a:r>
-              <a:rPr lang="en-IN" sz="2400" dirty="0" b="1"/>
-              <a:t>Fast Screen</a:t>
-            </a:r>
-            <a:r>
-              <a:rPr lang="en-IN" sz="2400" dirty="0"/>
-              <a:t> – built-in measurements + DenseNet-121 score 4 abnormality groups.</a:t>
+              <a:rPr lang="en-IN" sz="2000" dirty="0" b="1"/>
+              <a:t>Adaptive Router</a:t>
+            </a:r>
+            <a:r>
+              <a:rPr lang="en-IN" sz="2000" dirty="0"/>
+              <a:t> – fast screen, then only the needed specialists; normal scans exit early.</a:t>
             </a:r>
           </a:p>
           <a:p>
             <a:pPr lvl="0"/>
             <a:r>
-              <a:rPr lang="en-IN" sz="2400" dirty="0" b="1"/>
-              <a:t>Adaptive Router</a:t>
-            </a:r>
-            <a:r>
-              <a:rPr lang="en-IN" sz="2400" dirty="0"/>
-              <a:t> – runs only the specialists a scan needs; normal scans exit early.</a:t>
+              <a:rPr lang="en-IN" sz="2000" dirty="0" b="1"/>
+              <a:t>Deep Learning</a:t>
+            </a:r>
+            <a:r>
+              <a:rPr lang="en-IN" sz="2000" dirty="0"/>
+              <a:t> – DenseNet-121 classifier + PSPNet lung / heart segmentation.</a:t>
             </a:r>
           </a:p>
           <a:p>
             <a:pPr lvl="0"/>
             <a:r>
-              <a:rPr lang="en-IN" sz="2400" dirty="0" b="1"/>
-              <a:t>Specialist Modules</a:t>
-            </a:r>
-            <a:r>
-              <a:rPr lang="en-IN" sz="2400" dirty="0"/>
-              <a:t> – Cardiac (CTR), Pleural, Parenchyma (6 zones), Nodule / Mass.</a:t>
+              <a:rPr lang="en-IN" sz="2000" dirty="0" b="1"/>
+              <a:t>Confidence Engine</a:t>
+            </a:r>
+            <a:r>
+              <a:rPr lang="en-IN" sz="2000" dirty="0"/>
+              <a:t> – stability, agreement, quality; abstains when unsure.</a:t>
             </a:r>
           </a:p>
           <a:p>
             <a:pPr lvl="0"/>
             <a:r>
-              <a:rPr lang="en-IN" sz="2400" dirty="0" b="1"/>
-              <a:t>Confidence Engine</a:t>
-            </a:r>
-            <a:r>
-              <a:rPr lang="en-IN" sz="2400" dirty="0"/>
-              <a:t> – stability, model–measurement agreement, quality; abstains when unsure.</a:t>
+              <a:rPr lang="en-IN" sz="2000" dirty="0" b="1"/>
+              <a:t>Doctor-chosen Modes</a:t>
+            </a:r>
+            <a:r>
+              <a:rPr lang="en-IN" sz="2000" dirty="0"/>
+              <a:t> – Guided · Concise · Second opinion · Evidence-first.</a:t>
             </a:r>
           </a:p>
           <a:p>
             <a:pPr lvl="0"/>
             <a:r>
-              <a:rPr lang="en-IN" sz="2400" dirty="0" b="1"/>
-              <a:t>Medical RAG</a:t>
-            </a:r>
-            <a:r>
-              <a:rPr lang="en-IN" sz="2400" dirty="0"/>
-              <a:t> – cited guideline evidence; depth adapts to context and uncertainty.</a:t>
+              <a:rPr lang="en-IN" sz="2000" dirty="0" b="1"/>
+              <a:t>Generative AI + RAG</a:t>
+            </a:r>
+            <a:r>
+              <a:rPr lang="en-IN" sz="2000" dirty="0"/>
+              <a:t> – cited evidence and a fact-checked draft report.</a:t>
             </a:r>
           </a:p>
           <a:p>
             <a:pPr lvl="0"/>
             <a:r>
-              <a:rPr lang="en-IN" sz="2400" dirty="0" b="1"/>
-              <a:t>Doctor in Control</a:t>
-            </a:r>
-            <a:r>
-              <a:rPr lang="en-IN" sz="2400" dirty="0"/>
-              <a:t> – Accept, Correct, Reject or Question; blinded first read.</a:t>
+              <a:rPr lang="en-IN" sz="2000" dirty="0" b="1"/>
+              <a:t>Recommendations</a:t>
+            </a:r>
+            <a:r>
+              <a:rPr lang="en-IN" sz="2000" dirty="0"/>
+              <a:t> – urgency, next test, follow-up; patterns across findings.</a:t>
             </a:r>
           </a:p>
           <a:p>
             <a:pPr lvl="0"/>
             <a:r>
-              <a:rPr lang="en-IN" sz="2400" dirty="0" b="1"/>
-              <a:t>Audit &amp; Bias</a:t>
-            </a:r>
-            <a:r>
-              <a:rPr lang="en-IN" sz="2400" dirty="0"/>
-              <a:t> – SHA-256 hash-chained trail; subgroup bias monitoring.</a:t>
+              <a:rPr lang="en-IN" sz="2000" dirty="0" b="1"/>
+              <a:t>Learns from Doctors (ML)</a:t>
+            </a:r>
+            <a:r>
+              <a:rPr lang="en-IN" sz="2000" dirty="0"/>
+              <a:t> – model retrained on Accept / Correct / Reject.</a:t>
+            </a:r>
+          </a:p>
+          <a:p>
+            <a:pPr lvl="0"/>
+            <a:r>
+              <a:rPr lang="en-IN" sz="2000" dirty="0" b="1"/>
+              <a:t>Trust &amp; Safety</a:t>
+            </a:r>
+            <a:r>
+              <a:rPr lang="en-IN" sz="2000" dirty="0"/>
+              <a:t> – audit chain, privacy, bias reduction, Doctor + AI testing.</a:t>
             </a:r>
           </a:p>
         </p:txBody>
@@ -10738,6 +12094,17 @@
             <a:pPr lvl="0"/>
             <a:r>
               <a:rPr lang="en-IN" sz="1600" dirty="0" b="1"/>
+              <a:t>Adapts to the Doctor</a:t>
+            </a:r>
+            <a:r>
+              <a:rPr lang="en-IN" sz="1600" dirty="0"/>
+              <a:t> – doctor-chosen modes, never assumed from seniority.</a:t>
+            </a:r>
+          </a:p>
+          <a:p>
+            <a:pPr lvl="0"/>
+            <a:r>
+              <a:rPr lang="en-IN" sz="1600" dirty="0" b="1"/>
               <a:t>Adaptive Routing</a:t>
             </a:r>
             <a:r>
@@ -10749,22 +12116,11 @@
             <a:pPr lvl="0"/>
             <a:r>
               <a:rPr lang="en-IN" sz="1600" dirty="0" b="1"/>
-              <a:t>Progressive Analysis</a:t>
+              <a:t>Explainable</a:t>
             </a:r>
             <a:r>
               <a:rPr lang="en-IN" sz="1600" dirty="0"/>
-              <a:t> – normal scans exit early; complex ones go deeper.</a:t>
-            </a:r>
-          </a:p>
-          <a:p>
-            <a:pPr lvl="0"/>
-            <a:r>
-              <a:rPr lang="en-IN" sz="1600" dirty="0" b="1"/>
-              <a:t>Explainable</a:t>
-            </a:r>
-            <a:r>
-              <a:rPr lang="en-IN" sz="1600" dirty="0"/>
-              <a:t> – heatmap, regions, measurements and cited evidence.</a:t>
+              <a:t> – heatmap, why it matters, cited evidence, draft report.</a:t>
             </a:r>
           </a:p>
           <a:p>
@@ -10793,11 +12149,11 @@
             <a:pPr lvl="0"/>
             <a:r>
               <a:rPr lang="en-IN" sz="1600" dirty="0" b="1"/>
-              <a:t>Traceable &amp; Private</a:t>
+              <a:t>Traceable &amp; Fair</a:t>
             </a:r>
             <a:r>
               <a:rPr lang="en-IN" sz="1600" dirty="0"/>
-              <a:t> – hash-chained audit, DICOM de-identification.</a:t>
+              <a:t> – audit chain, de-identification, bias reduction.</a:t>
             </a:r>
           </a:p>
         </p:txBody>
@@ -10858,7 +12214,7 @@
             </a:r>
             <a:r>
               <a:rPr lang="en-IN" sz="1600" dirty="0"/>
-              <a:t> – tested on synthetic phantoms; needs CheXpert / hospital data.</a:t>
+              <a:t> – real-image check: sensitivity 0.80, specificity 0.44 (50 films).</a:t>
             </a:r>
           </a:p>
           <a:p>
@@ -12693,7 +14049,7 @@
                   <a:srgbClr val="FFFFFF"/>
                 </a:solidFill>
               </a:rPr>
-              <a:t>Lung segmentation, CTR, zones</a:t>
+              <a:t>PSPNet + classical lung segmentation</a:t>
             </a:r>
           </a:p>
           <a:p>
@@ -12885,7 +14241,7 @@
                   <a:srgbClr val="FFFFFF"/>
                 </a:solidFill>
               </a:rPr>
-              <a:t>Phase 4 — Evidence &amp; UI ✓</a:t>
+              <a:t>Phase 4 — Doctor Interface ✓</a:t>
             </a:r>
           </a:p>
           <a:p>
@@ -12901,7 +14257,7 @@
                   <a:srgbClr val="FFFFFF"/>
                 </a:solidFill>
               </a:rPr>
-              <a:t>Medical RAG with citations</a:t>
+              <a:t>Doctor-chosen support modes</a:t>
             </a:r>
           </a:p>
           <a:p>
@@ -12917,7 +14273,7 @@
                   <a:srgbClr val="FFFFFF"/>
                 </a:solidFill>
               </a:rPr>
-              <a:t>PyQt6 app: Accept / Correct / Reject / Question</a:t>
+              <a:t>Recommendations + draft report (GenAI)</a:t>
             </a:r>
           </a:p>
           <a:p>
@@ -12933,7 +14289,7 @@
                   <a:srgbClr val="FFFFFF"/>
                 </a:solidFill>
               </a:rPr>
-              <a:t>Blinded first read, audit trail</a:t>
+              <a:t>Feedback-trained ML, audit, bias reduction</a:t>
             </a:r>
           </a:p>
         </p:txBody>
@@ -12989,7 +14345,7 @@
                   <a:srgbClr val="FFFFFF"/>
                 </a:solidFill>
               </a:rPr>
-              <a:t>Phase 5 — Evaluation (ongoing)</a:t>
+              <a:t>Phase 5 — Evaluation ✓ / next</a:t>
             </a:r>
           </a:p>
           <a:p>
@@ -13005,7 +14361,7 @@
                   <a:srgbClr val="FFFFFF"/>
                 </a:solidFill>
               </a:rPr>
-              <a:t>Fixed vs adaptive benchmark: done</a:t>
+              <a:t>Fixed vs adaptive + Doctor + AI simulation</a:t>
             </a:r>
           </a:p>
           <a:p>
@@ -13021,7 +14377,7 @@
                   <a:srgbClr val="FFFFFF"/>
                 </a:solidFill>
               </a:rPr>
-              <a:t>Next: CheXpert validation set</a:t>
+              <a:t>Real-image check (50 films)</a:t>
             </a:r>
           </a:p>
           <a:p>
@@ -13037,7 +14393,7 @@
                   <a:srgbClr val="FFFFFF"/>
                 </a:solidFill>
               </a:rPr>
-              <a:t>Next: radiologist reader study</a:t>
+              <a:t>Next: CheXpert + radiologist reader study</a:t>
             </a:r>
           </a:p>
         </p:txBody>
@@ -13911,7 +15267,7 @@
             </a:pPr>
             <a:r>
               <a:rPr lang="en-IN" dirty="0"/>
-              <a:t>Chest X-ray reading must stay accurate across variable image quality and case complexity. MEDSCAN is a working desktop prototype of an Adaptive AI-driven chest X-ray assistant. Instead of running every model on every scan, it checks scan quality first, sends poor or incomplete films to a human, screens the rest once, and routes only suspicious findings to region-specific specialist modules for the heart, pleura, lung zones and nodules. A pretrained DenseNet-121 is fused with interpretable measurements such as the cardiothoracic ratio. Every finding carries a probability, a confidence built from stability, agreement and quality, its evidence and its limitations, and the engine abstains when unsure. Medical RAG adds cited guideline evidence at a depth matched to the clinical context. Doctors accept, correct, reject or question each finding after a blinded first read, and every decision is kept in a hash-chained audit trail with subgroup bias monitoring. On a 25-image synthetic benchmark, adaptive routing cut analysis time by 50% and specialist-module use by 75% versus a fixed pipeline with no loss of sensitivity or specificity. Validation on CheXpert and a radiologist reader study are next.</a:t>
+              <a:t>Doctors need different kinds of help, and the right help also depends on urgency and image quality. MEDSCAN is a working Adaptive AI chest X-ray assistant. It checks scan quality first and sends poor films to a human. It screens each scan once and routes only suspicious findings to specialist modules for the heart, pleura, lung zones and nodules. Deep learning (DenseNet-121, PSPNet segmentation) is fused with interpretable measurements. Every finding carries a probability, a confidence, why it may matter and its limits, and the engine abstains when unsure. Each doctor chooses how MEDSCAN helps them - Guided, Concise, Second opinion or Evidence-first - with no assumption about ability. Generative AI drafts a fact-checked report with cited evidence, a recommendation engine proposes next steps, and a machine-learning model retrains on doctors' Accept, Correct and Reject decisions. Decisions are kept in a hash-chained audit trail, patient data is de-identified, and subgroup thresholds reduce bias. Adaptive routing cut analysis time by 50% with no loss of accuracy on our benchmark. In simulation, doctors who used the AI's confidence beat both the AI and their own solo read. On 50 real films, pneumonia sensitivity was 0.80.</a:t>
             </a:r>
           </a:p>
         </p:txBody>

--- a/presentation/MEDSCAN_TECHgium_MedTech.pptx
+++ b/presentation/MEDSCAN_TECHgium_MedTech.pptx
@@ -10998,7 +10998,7 @@
                   <a:srgbClr val="0E2841"/>
                 </a:solidFill>
               </a:rPr>
-              <a:t>pneumonia sensitivity on 50 real chest X-rays (AUC 0.74)</a:t>
+              <a:t>pneumonia sensitivity on 50 real chest X-rays (AUC 0.82)</a:t>
             </a:r>
           </a:p>
         </p:txBody>
@@ -11052,7 +11052,7 @@
                   <a:schemeClr val="accent1"/>
                 </a:solidFill>
               </a:rPr>
-              <a:t>49 / 50</a:t>
+              <a:t>50 / 50</a:t>
             </a:r>
           </a:p>
           <a:p>
@@ -11063,7 +11063,7 @@
                   <a:srgbClr val="0E2841"/>
                 </a:solidFill>
               </a:rPr>
-              <a:t>real films passed the quality gate after learned segmentation</a:t>
+              <a:t>real films passed the quality gate (learned-segmentation fallback)</a:t>
             </a:r>
           </a:p>
         </p:txBody>
@@ -12214,7 +12214,7 @@
             </a:r>
             <a:r>
               <a:rPr lang="en-IN" sz="1600" dirty="0"/>
-              <a:t> – real-image check: sensitivity 0.80, specificity 0.44 (50 films).</a:t>
+              <a:t> – real-image check: sensitivity 0.80, specificity 0.50 (50 films).</a:t>
             </a:r>
           </a:p>
           <a:p>
